--- a/slides/slide-03.pptx
+++ b/slides/slide-03.pptx
@@ -4373,8 +4373,8 @@
         </p:nvSpPr>
         <p:spPr>
           <a:xfrm xmlns:a="http://schemas.openxmlformats.org/drawingml/2006/main">
-            <a:off x="609480" y="552600"/>
-            <a:ext cx="10572480" cy="628200"/>
+            <a:off x="609600" y="609600"/>
+            <a:ext cx="10972800" cy="685800"/>
           </a:xfrm>
           <a:prstGeom xmlns:a="http://schemas.openxmlformats.org/drawingml/2006/main" prst="rect">
             <a:avLst/>
@@ -4395,80 +4395,80 @@
             <a:noAutofit/>
           </a:bodyPr>
           <a:lstStyle xmlns:a="http://schemas.openxmlformats.org/drawingml/2006/main">
-            <a:defPPr>
-              <a:defRPr>
+            <a:defPPr algn="l">
+              <a:defRPr sz="3300">
                 <a:latin typeface="HarmonyOS Sans SC"/>
                 <a:ea typeface="HarmonyOS Sans SC"/>
                 <a:cs typeface="HarmonyOS Sans SC"/>
               </a:defRPr>
             </a:defPPr>
-            <a:lvl1pPr>
-              <a:buNone/>
-              <a:defRPr>
+            <a:lvl1pPr algn="l">
+              <a:buNone/>
+              <a:defRPr sz="3300">
                 <a:latin typeface="HarmonyOS Sans SC"/>
                 <a:ea typeface="HarmonyOS Sans SC"/>
                 <a:cs typeface="HarmonyOS Sans SC"/>
               </a:defRPr>
             </a:lvl1pPr>
-            <a:lvl2pPr>
-              <a:buNone/>
-              <a:defRPr>
+            <a:lvl2pPr algn="l">
+              <a:buNone/>
+              <a:defRPr sz="3300">
                 <a:latin typeface="HarmonyOS Sans SC"/>
                 <a:ea typeface="HarmonyOS Sans SC"/>
                 <a:cs typeface="HarmonyOS Sans SC"/>
               </a:defRPr>
             </a:lvl2pPr>
-            <a:lvl3pPr>
-              <a:buNone/>
-              <a:defRPr>
+            <a:lvl3pPr algn="l">
+              <a:buNone/>
+              <a:defRPr sz="3300">
                 <a:latin typeface="HarmonyOS Sans SC"/>
                 <a:ea typeface="HarmonyOS Sans SC"/>
                 <a:cs typeface="HarmonyOS Sans SC"/>
               </a:defRPr>
             </a:lvl3pPr>
-            <a:lvl4pPr>
-              <a:buNone/>
-              <a:defRPr>
+            <a:lvl4pPr algn="l">
+              <a:buNone/>
+              <a:defRPr sz="3300">
                 <a:latin typeface="HarmonyOS Sans SC"/>
                 <a:ea typeface="HarmonyOS Sans SC"/>
                 <a:cs typeface="HarmonyOS Sans SC"/>
               </a:defRPr>
             </a:lvl4pPr>
-            <a:lvl5pPr>
-              <a:buNone/>
-              <a:defRPr>
+            <a:lvl5pPr algn="l">
+              <a:buNone/>
+              <a:defRPr sz="3300">
                 <a:latin typeface="HarmonyOS Sans SC"/>
                 <a:ea typeface="HarmonyOS Sans SC"/>
                 <a:cs typeface="HarmonyOS Sans SC"/>
               </a:defRPr>
             </a:lvl5pPr>
-            <a:lvl6pPr>
-              <a:buNone/>
-              <a:defRPr>
+            <a:lvl6pPr algn="l">
+              <a:buNone/>
+              <a:defRPr sz="3300">
                 <a:latin typeface="HarmonyOS Sans SC"/>
                 <a:ea typeface="HarmonyOS Sans SC"/>
                 <a:cs typeface="HarmonyOS Sans SC"/>
               </a:defRPr>
             </a:lvl6pPr>
-            <a:lvl7pPr>
-              <a:buNone/>
-              <a:defRPr>
+            <a:lvl7pPr algn="l">
+              <a:buNone/>
+              <a:defRPr sz="3300">
                 <a:latin typeface="HarmonyOS Sans SC"/>
                 <a:ea typeface="HarmonyOS Sans SC"/>
                 <a:cs typeface="HarmonyOS Sans SC"/>
               </a:defRPr>
             </a:lvl7pPr>
-            <a:lvl8pPr>
-              <a:buNone/>
-              <a:defRPr>
+            <a:lvl8pPr algn="l">
+              <a:buNone/>
+              <a:defRPr sz="3300">
                 <a:latin typeface="HarmonyOS Sans SC"/>
                 <a:ea typeface="HarmonyOS Sans SC"/>
                 <a:cs typeface="HarmonyOS Sans SC"/>
               </a:defRPr>
             </a:lvl8pPr>
-            <a:lvl9pPr>
-              <a:buNone/>
-              <a:defRPr>
+            <a:lvl9pPr algn="l">
+              <a:buNone/>
+              <a:defRPr sz="3300">
                 <a:latin typeface="HarmonyOS Sans SC"/>
                 <a:ea typeface="HarmonyOS Sans SC"/>
                 <a:cs typeface="HarmonyOS Sans SC"/>
@@ -4476,19 +4476,19 @@
             </a:lvl9pPr>
           </a:lstStyle>
           <a:p xmlns:a="http://schemas.openxmlformats.org/drawingml/2006/main">
-            <a:pPr>
+            <a:pPr algn="l">
               <a:lnSpc>
                 <a:spcPct val="116000"/>
               </a:lnSpc>
               <a:buNone/>
-              <a:defRPr>
+              <a:defRPr sz="3300">
                 <a:latin typeface="HarmonyOS Sans SC"/>
                 <a:ea typeface="HarmonyOS Sans SC"/>
                 <a:cs typeface="HarmonyOS Sans SC"/>
               </a:defRPr>
             </a:pPr>
             <a:r>
-              <a:rPr sz="3450" b="1" u="none" strike="noStrike">
+              <a:rPr sz="3300" b="1" u="none" strike="noStrike">
                 <a:solidFill>
                   <a:srgbClr val="F7F7F2"/>
                 </a:solidFill>
@@ -4499,7 +4499,7 @@
               <a:t>203 </a:t>
             </a:r>
             <a:r>
-              <a:rPr sz="3450" b="1" u="none" strike="noStrike">
+              <a:rPr sz="3300" b="1" u="none" strike="noStrike">
                 <a:solidFill>
                   <a:srgbClr val="F7F7F2"/>
                 </a:solidFill>
@@ -4536,8 +4536,8 @@
         </p:nvSpPr>
         <p:spPr>
           <a:xfrm xmlns:a="http://schemas.openxmlformats.org/drawingml/2006/main">
-            <a:off x="590400" y="1762200"/>
-            <a:ext cx="5905080" cy="1352160"/>
+            <a:off x="609600" y="2209800"/>
+            <a:ext cx="5372100" cy="1371600"/>
           </a:xfrm>
           <a:prstGeom xmlns:a="http://schemas.openxmlformats.org/drawingml/2006/main" prst="rect">
             <a:avLst/>
@@ -4558,80 +4558,80 @@
             <a:noAutofit/>
           </a:bodyPr>
           <a:lstStyle xmlns:a="http://schemas.openxmlformats.org/drawingml/2006/main">
-            <a:defPPr>
-              <a:defRPr>
+            <a:defPPr algn="l">
+              <a:defRPr sz="7800">
                 <a:latin typeface="HarmonyOS Sans SC"/>
                 <a:ea typeface="HarmonyOS Sans SC"/>
                 <a:cs typeface="HarmonyOS Sans SC"/>
               </a:defRPr>
             </a:defPPr>
-            <a:lvl1pPr>
-              <a:buNone/>
-              <a:defRPr>
+            <a:lvl1pPr algn="l">
+              <a:buNone/>
+              <a:defRPr sz="7800">
                 <a:latin typeface="HarmonyOS Sans SC"/>
                 <a:ea typeface="HarmonyOS Sans SC"/>
                 <a:cs typeface="HarmonyOS Sans SC"/>
               </a:defRPr>
             </a:lvl1pPr>
-            <a:lvl2pPr>
-              <a:buNone/>
-              <a:defRPr>
+            <a:lvl2pPr algn="l">
+              <a:buNone/>
+              <a:defRPr sz="7800">
                 <a:latin typeface="HarmonyOS Sans SC"/>
                 <a:ea typeface="HarmonyOS Sans SC"/>
                 <a:cs typeface="HarmonyOS Sans SC"/>
               </a:defRPr>
             </a:lvl2pPr>
-            <a:lvl3pPr>
-              <a:buNone/>
-              <a:defRPr>
+            <a:lvl3pPr algn="l">
+              <a:buNone/>
+              <a:defRPr sz="7800">
                 <a:latin typeface="HarmonyOS Sans SC"/>
                 <a:ea typeface="HarmonyOS Sans SC"/>
                 <a:cs typeface="HarmonyOS Sans SC"/>
               </a:defRPr>
             </a:lvl3pPr>
-            <a:lvl4pPr>
-              <a:buNone/>
-              <a:defRPr>
+            <a:lvl4pPr algn="l">
+              <a:buNone/>
+              <a:defRPr sz="7800">
                 <a:latin typeface="HarmonyOS Sans SC"/>
                 <a:ea typeface="HarmonyOS Sans SC"/>
                 <a:cs typeface="HarmonyOS Sans SC"/>
               </a:defRPr>
             </a:lvl4pPr>
-            <a:lvl5pPr>
-              <a:buNone/>
-              <a:defRPr>
+            <a:lvl5pPr algn="l">
+              <a:buNone/>
+              <a:defRPr sz="7800">
                 <a:latin typeface="HarmonyOS Sans SC"/>
                 <a:ea typeface="HarmonyOS Sans SC"/>
                 <a:cs typeface="HarmonyOS Sans SC"/>
               </a:defRPr>
             </a:lvl5pPr>
-            <a:lvl6pPr>
-              <a:buNone/>
-              <a:defRPr>
+            <a:lvl6pPr algn="l">
+              <a:buNone/>
+              <a:defRPr sz="7800">
                 <a:latin typeface="HarmonyOS Sans SC"/>
                 <a:ea typeface="HarmonyOS Sans SC"/>
                 <a:cs typeface="HarmonyOS Sans SC"/>
               </a:defRPr>
             </a:lvl6pPr>
-            <a:lvl7pPr>
-              <a:buNone/>
-              <a:defRPr>
+            <a:lvl7pPr algn="l">
+              <a:buNone/>
+              <a:defRPr sz="7800">
                 <a:latin typeface="HarmonyOS Sans SC"/>
                 <a:ea typeface="HarmonyOS Sans SC"/>
                 <a:cs typeface="HarmonyOS Sans SC"/>
               </a:defRPr>
             </a:lvl7pPr>
-            <a:lvl8pPr>
-              <a:buNone/>
-              <a:defRPr>
+            <a:lvl8pPr algn="l">
+              <a:buNone/>
+              <a:defRPr sz="7800">
                 <a:latin typeface="HarmonyOS Sans SC"/>
                 <a:ea typeface="HarmonyOS Sans SC"/>
                 <a:cs typeface="HarmonyOS Sans SC"/>
               </a:defRPr>
             </a:lvl8pPr>
-            <a:lvl9pPr>
-              <a:buNone/>
-              <a:defRPr>
+            <a:lvl9pPr algn="l">
+              <a:buNone/>
+              <a:defRPr sz="7800">
                 <a:latin typeface="HarmonyOS Sans SC"/>
                 <a:ea typeface="HarmonyOS Sans SC"/>
                 <a:cs typeface="HarmonyOS Sans SC"/>
@@ -4639,12 +4639,12 @@
             </a:lvl9pPr>
           </a:lstStyle>
           <a:p xmlns:a="http://schemas.openxmlformats.org/drawingml/2006/main">
-            <a:pPr>
+            <a:pPr algn="l">
               <a:lnSpc>
                 <a:spcPct val="116000"/>
               </a:lnSpc>
               <a:buNone/>
-              <a:defRPr>
+              <a:defRPr sz="7800">
                 <a:latin typeface="HarmonyOS Sans SC"/>
                 <a:ea typeface="HarmonyOS Sans SC"/>
                 <a:cs typeface="HarmonyOS Sans SC"/>
@@ -4710,8 +4710,8 @@
         </p:nvSpPr>
         <p:spPr>
           <a:xfrm xmlns:a="http://schemas.openxmlformats.org/drawingml/2006/main">
-            <a:off x="647640" y="3524400"/>
-            <a:ext cx="5905080" cy="456840"/>
+            <a:off x="609600" y="3962400"/>
+            <a:ext cx="5372100" cy="457200"/>
           </a:xfrm>
           <a:prstGeom xmlns:a="http://schemas.openxmlformats.org/drawingml/2006/main" prst="rect">
             <a:avLst/>
@@ -4732,80 +4732,80 @@
             <a:noAutofit/>
           </a:bodyPr>
           <a:lstStyle xmlns:a="http://schemas.openxmlformats.org/drawingml/2006/main">
-            <a:defPPr>
-              <a:defRPr>
+            <a:defPPr algn="l">
+              <a:defRPr sz="1950">
                 <a:latin typeface="HarmonyOS Sans SC"/>
                 <a:ea typeface="HarmonyOS Sans SC"/>
                 <a:cs typeface="HarmonyOS Sans SC"/>
               </a:defRPr>
             </a:defPPr>
-            <a:lvl1pPr>
-              <a:buNone/>
-              <a:defRPr>
+            <a:lvl1pPr algn="l">
+              <a:buNone/>
+              <a:defRPr sz="1950">
                 <a:latin typeface="HarmonyOS Sans SC"/>
                 <a:ea typeface="HarmonyOS Sans SC"/>
                 <a:cs typeface="HarmonyOS Sans SC"/>
               </a:defRPr>
             </a:lvl1pPr>
-            <a:lvl2pPr>
-              <a:buNone/>
-              <a:defRPr>
+            <a:lvl2pPr algn="l">
+              <a:buNone/>
+              <a:defRPr sz="1950">
                 <a:latin typeface="HarmonyOS Sans SC"/>
                 <a:ea typeface="HarmonyOS Sans SC"/>
                 <a:cs typeface="HarmonyOS Sans SC"/>
               </a:defRPr>
             </a:lvl2pPr>
-            <a:lvl3pPr>
-              <a:buNone/>
-              <a:defRPr>
+            <a:lvl3pPr algn="l">
+              <a:buNone/>
+              <a:defRPr sz="1950">
                 <a:latin typeface="HarmonyOS Sans SC"/>
                 <a:ea typeface="HarmonyOS Sans SC"/>
                 <a:cs typeface="HarmonyOS Sans SC"/>
               </a:defRPr>
             </a:lvl3pPr>
-            <a:lvl4pPr>
-              <a:buNone/>
-              <a:defRPr>
+            <a:lvl4pPr algn="l">
+              <a:buNone/>
+              <a:defRPr sz="1950">
                 <a:latin typeface="HarmonyOS Sans SC"/>
                 <a:ea typeface="HarmonyOS Sans SC"/>
                 <a:cs typeface="HarmonyOS Sans SC"/>
               </a:defRPr>
             </a:lvl4pPr>
-            <a:lvl5pPr>
-              <a:buNone/>
-              <a:defRPr>
+            <a:lvl5pPr algn="l">
+              <a:buNone/>
+              <a:defRPr sz="1950">
                 <a:latin typeface="HarmonyOS Sans SC"/>
                 <a:ea typeface="HarmonyOS Sans SC"/>
                 <a:cs typeface="HarmonyOS Sans SC"/>
               </a:defRPr>
             </a:lvl5pPr>
-            <a:lvl6pPr>
-              <a:buNone/>
-              <a:defRPr>
+            <a:lvl6pPr algn="l">
+              <a:buNone/>
+              <a:defRPr sz="1950">
                 <a:latin typeface="HarmonyOS Sans SC"/>
                 <a:ea typeface="HarmonyOS Sans SC"/>
                 <a:cs typeface="HarmonyOS Sans SC"/>
               </a:defRPr>
             </a:lvl6pPr>
-            <a:lvl7pPr>
-              <a:buNone/>
-              <a:defRPr>
+            <a:lvl7pPr algn="l">
+              <a:buNone/>
+              <a:defRPr sz="1950">
                 <a:latin typeface="HarmonyOS Sans SC"/>
                 <a:ea typeface="HarmonyOS Sans SC"/>
                 <a:cs typeface="HarmonyOS Sans SC"/>
               </a:defRPr>
             </a:lvl7pPr>
-            <a:lvl8pPr>
-              <a:buNone/>
-              <a:defRPr>
+            <a:lvl8pPr algn="l">
+              <a:buNone/>
+              <a:defRPr sz="1950">
                 <a:latin typeface="HarmonyOS Sans SC"/>
                 <a:ea typeface="HarmonyOS Sans SC"/>
                 <a:cs typeface="HarmonyOS Sans SC"/>
               </a:defRPr>
             </a:lvl8pPr>
-            <a:lvl9pPr>
-              <a:buNone/>
-              <a:defRPr>
+            <a:lvl9pPr algn="l">
+              <a:buNone/>
+              <a:defRPr sz="1950">
                 <a:latin typeface="HarmonyOS Sans SC"/>
                 <a:ea typeface="HarmonyOS Sans SC"/>
                 <a:cs typeface="HarmonyOS Sans SC"/>
@@ -4813,19 +4813,19 @@
             </a:lvl9pPr>
           </a:lstStyle>
           <a:p xmlns:a="http://schemas.openxmlformats.org/drawingml/2006/main">
-            <a:pPr>
+            <a:pPr algn="l">
               <a:lnSpc>
                 <a:spcPct val="116000"/>
               </a:lnSpc>
               <a:buNone/>
-              <a:defRPr>
+              <a:defRPr sz="1950">
                 <a:latin typeface="HarmonyOS Sans SC"/>
                 <a:ea typeface="HarmonyOS Sans SC"/>
                 <a:cs typeface="HarmonyOS Sans SC"/>
               </a:defRPr>
             </a:pPr>
             <a:r>
-              <a:rPr sz="2400" b="0" u="none" strike="noStrike">
+              <a:rPr sz="1950" b="0" u="none" strike="noStrike">
                 <a:solidFill>
                   <a:srgbClr val="F7F7F2"/>
                 </a:solidFill>
@@ -4862,8 +4862,8 @@
         </p:nvSpPr>
         <p:spPr>
           <a:xfrm xmlns:a="http://schemas.openxmlformats.org/drawingml/2006/main">
-            <a:off x="647640" y="4238640"/>
-            <a:ext cx="6190920" cy="1104480"/>
+            <a:off x="609600" y="4572000"/>
+            <a:ext cx="5372100" cy="1219200"/>
           </a:xfrm>
           <a:prstGeom xmlns:a="http://schemas.openxmlformats.org/drawingml/2006/main" prst="rect">
             <a:avLst/>
@@ -4884,80 +4884,80 @@
             <a:noAutofit/>
           </a:bodyPr>
           <a:lstStyle xmlns:a="http://schemas.openxmlformats.org/drawingml/2006/main">
-            <a:defPPr>
-              <a:defRPr>
+            <a:defPPr algn="l">
+              <a:defRPr sz="3000">
                 <a:latin typeface="HarmonyOS Sans SC"/>
                 <a:ea typeface="HarmonyOS Sans SC"/>
                 <a:cs typeface="HarmonyOS Sans SC"/>
               </a:defRPr>
             </a:defPPr>
-            <a:lvl1pPr>
-              <a:buNone/>
-              <a:defRPr>
+            <a:lvl1pPr algn="l">
+              <a:buNone/>
+              <a:defRPr sz="3000">
                 <a:latin typeface="HarmonyOS Sans SC"/>
                 <a:ea typeface="HarmonyOS Sans SC"/>
                 <a:cs typeface="HarmonyOS Sans SC"/>
               </a:defRPr>
             </a:lvl1pPr>
-            <a:lvl2pPr>
-              <a:buNone/>
-              <a:defRPr>
+            <a:lvl2pPr algn="l">
+              <a:buNone/>
+              <a:defRPr sz="3000">
                 <a:latin typeface="HarmonyOS Sans SC"/>
                 <a:ea typeface="HarmonyOS Sans SC"/>
                 <a:cs typeface="HarmonyOS Sans SC"/>
               </a:defRPr>
             </a:lvl2pPr>
-            <a:lvl3pPr>
-              <a:buNone/>
-              <a:defRPr>
+            <a:lvl3pPr algn="l">
+              <a:buNone/>
+              <a:defRPr sz="3000">
                 <a:latin typeface="HarmonyOS Sans SC"/>
                 <a:ea typeface="HarmonyOS Sans SC"/>
                 <a:cs typeface="HarmonyOS Sans SC"/>
               </a:defRPr>
             </a:lvl3pPr>
-            <a:lvl4pPr>
-              <a:buNone/>
-              <a:defRPr>
+            <a:lvl4pPr algn="l">
+              <a:buNone/>
+              <a:defRPr sz="3000">
                 <a:latin typeface="HarmonyOS Sans SC"/>
                 <a:ea typeface="HarmonyOS Sans SC"/>
                 <a:cs typeface="HarmonyOS Sans SC"/>
               </a:defRPr>
             </a:lvl4pPr>
-            <a:lvl5pPr>
-              <a:buNone/>
-              <a:defRPr>
+            <a:lvl5pPr algn="l">
+              <a:buNone/>
+              <a:defRPr sz="3000">
                 <a:latin typeface="HarmonyOS Sans SC"/>
                 <a:ea typeface="HarmonyOS Sans SC"/>
                 <a:cs typeface="HarmonyOS Sans SC"/>
               </a:defRPr>
             </a:lvl5pPr>
-            <a:lvl6pPr>
-              <a:buNone/>
-              <a:defRPr>
+            <a:lvl6pPr algn="l">
+              <a:buNone/>
+              <a:defRPr sz="3000">
                 <a:latin typeface="HarmonyOS Sans SC"/>
                 <a:ea typeface="HarmonyOS Sans SC"/>
                 <a:cs typeface="HarmonyOS Sans SC"/>
               </a:defRPr>
             </a:lvl6pPr>
-            <a:lvl7pPr>
-              <a:buNone/>
-              <a:defRPr>
+            <a:lvl7pPr algn="l">
+              <a:buNone/>
+              <a:defRPr sz="3000">
                 <a:latin typeface="HarmonyOS Sans SC"/>
                 <a:ea typeface="HarmonyOS Sans SC"/>
                 <a:cs typeface="HarmonyOS Sans SC"/>
               </a:defRPr>
             </a:lvl7pPr>
-            <a:lvl8pPr>
-              <a:buNone/>
-              <a:defRPr>
+            <a:lvl8pPr algn="l">
+              <a:buNone/>
+              <a:defRPr sz="3000">
                 <a:latin typeface="HarmonyOS Sans SC"/>
                 <a:ea typeface="HarmonyOS Sans SC"/>
                 <a:cs typeface="HarmonyOS Sans SC"/>
               </a:defRPr>
             </a:lvl8pPr>
-            <a:lvl9pPr>
-              <a:buNone/>
-              <a:defRPr>
+            <a:lvl9pPr algn="l">
+              <a:buNone/>
+              <a:defRPr sz="3000">
                 <a:latin typeface="HarmonyOS Sans SC"/>
                 <a:ea typeface="HarmonyOS Sans SC"/>
                 <a:cs typeface="HarmonyOS Sans SC"/>
@@ -4965,19 +4965,19 @@
             </a:lvl9pPr>
           </a:lstStyle>
           <a:p xmlns:a="http://schemas.openxmlformats.org/drawingml/2006/main">
-            <a:pPr>
+            <a:pPr algn="l">
               <a:lnSpc>
                 <a:spcPct val="116000"/>
               </a:lnSpc>
               <a:buNone/>
-              <a:defRPr>
+              <a:defRPr sz="3000">
                 <a:latin typeface="HarmonyOS Sans SC"/>
                 <a:ea typeface="HarmonyOS Sans SC"/>
                 <a:cs typeface="HarmonyOS Sans SC"/>
               </a:defRPr>
             </a:pPr>
             <a:r>
-              <a:rPr sz="3150" b="1" u="none" strike="noStrike">
+              <a:rPr sz="3000" b="1" u="none" strike="noStrike">
                 <a:solidFill>
                   <a:srgbClr val="F7F7F2"/>
                 </a:solidFill>
@@ -4997,19 +4997,19 @@
             </a:endParaRPr>
           </a:p>
           <a:p xmlns:a="http://schemas.openxmlformats.org/drawingml/2006/main">
-            <a:pPr>
+            <a:pPr algn="l">
               <a:lnSpc>
                 <a:spcPct val="116000"/>
               </a:lnSpc>
               <a:buNone/>
-              <a:defRPr>
+              <a:defRPr sz="3000">
                 <a:latin typeface="HarmonyOS Sans SC"/>
                 <a:ea typeface="HarmonyOS Sans SC"/>
                 <a:cs typeface="HarmonyOS Sans SC"/>
               </a:defRPr>
             </a:pPr>
             <a:r>
-              <a:rPr sz="3150" b="1" u="none" strike="noStrike">
+              <a:rPr sz="3000" b="1" u="none" strike="noStrike">
                 <a:solidFill>
                   <a:srgbClr val="F7F7F2"/>
                 </a:solidFill>
@@ -5050,8 +5050,8 @@
         </p:blipFill>
         <p:spPr>
           <a:xfrm xmlns:a="http://schemas.openxmlformats.org/drawingml/2006/main">
-            <a:off x="7553160" y="1714680"/>
-            <a:ext cx="4000320" cy="3333240"/>
+            <a:off x="7143750" y="1905000"/>
+            <a:ext cx="4438650" cy="3698476"/>
           </a:xfrm>
           <a:prstGeom xmlns:a="http://schemas.openxmlformats.org/drawingml/2006/main" prst="rect">
             <a:avLst/>
@@ -5077,8 +5077,8 @@
         </p:nvSpPr>
         <p:spPr>
           <a:xfrm xmlns:a="http://schemas.openxmlformats.org/drawingml/2006/main">
-            <a:off x="7553160" y="5315040"/>
-            <a:ext cx="4000320" cy="304560"/>
+            <a:off x="7143750" y="5791200"/>
+            <a:ext cx="4438650" cy="381000"/>
           </a:xfrm>
           <a:prstGeom xmlns:a="http://schemas.openxmlformats.org/drawingml/2006/main" prst="rect">
             <a:avLst/>
@@ -5099,80 +5099,80 @@
             <a:noAutofit/>
           </a:bodyPr>
           <a:lstStyle xmlns:a="http://schemas.openxmlformats.org/drawingml/2006/main">
-            <a:defPPr>
-              <a:defRPr>
+            <a:defPPr algn="l">
+              <a:defRPr sz="1650">
                 <a:latin typeface="HarmonyOS Sans SC"/>
                 <a:ea typeface="HarmonyOS Sans SC"/>
                 <a:cs typeface="HarmonyOS Sans SC"/>
               </a:defRPr>
             </a:defPPr>
-            <a:lvl1pPr>
-              <a:buNone/>
-              <a:defRPr>
+            <a:lvl1pPr algn="l">
+              <a:buNone/>
+              <a:defRPr sz="1650">
                 <a:latin typeface="HarmonyOS Sans SC"/>
                 <a:ea typeface="HarmonyOS Sans SC"/>
                 <a:cs typeface="HarmonyOS Sans SC"/>
               </a:defRPr>
             </a:lvl1pPr>
-            <a:lvl2pPr>
-              <a:buNone/>
-              <a:defRPr>
+            <a:lvl2pPr algn="l">
+              <a:buNone/>
+              <a:defRPr sz="1650">
                 <a:latin typeface="HarmonyOS Sans SC"/>
                 <a:ea typeface="HarmonyOS Sans SC"/>
                 <a:cs typeface="HarmonyOS Sans SC"/>
               </a:defRPr>
             </a:lvl2pPr>
-            <a:lvl3pPr>
-              <a:buNone/>
-              <a:defRPr>
+            <a:lvl3pPr algn="l">
+              <a:buNone/>
+              <a:defRPr sz="1650">
                 <a:latin typeface="HarmonyOS Sans SC"/>
                 <a:ea typeface="HarmonyOS Sans SC"/>
                 <a:cs typeface="HarmonyOS Sans SC"/>
               </a:defRPr>
             </a:lvl3pPr>
-            <a:lvl4pPr>
-              <a:buNone/>
-              <a:defRPr>
+            <a:lvl4pPr algn="l">
+              <a:buNone/>
+              <a:defRPr sz="1650">
                 <a:latin typeface="HarmonyOS Sans SC"/>
                 <a:ea typeface="HarmonyOS Sans SC"/>
                 <a:cs typeface="HarmonyOS Sans SC"/>
               </a:defRPr>
             </a:lvl4pPr>
-            <a:lvl5pPr>
-              <a:buNone/>
-              <a:defRPr>
+            <a:lvl5pPr algn="l">
+              <a:buNone/>
+              <a:defRPr sz="1650">
                 <a:latin typeface="HarmonyOS Sans SC"/>
                 <a:ea typeface="HarmonyOS Sans SC"/>
                 <a:cs typeface="HarmonyOS Sans SC"/>
               </a:defRPr>
             </a:lvl5pPr>
-            <a:lvl6pPr>
-              <a:buNone/>
-              <a:defRPr>
+            <a:lvl6pPr algn="l">
+              <a:buNone/>
+              <a:defRPr sz="1650">
                 <a:latin typeface="HarmonyOS Sans SC"/>
                 <a:ea typeface="HarmonyOS Sans SC"/>
                 <a:cs typeface="HarmonyOS Sans SC"/>
               </a:defRPr>
             </a:lvl6pPr>
-            <a:lvl7pPr>
-              <a:buNone/>
-              <a:defRPr>
+            <a:lvl7pPr algn="l">
+              <a:buNone/>
+              <a:defRPr sz="1650">
                 <a:latin typeface="HarmonyOS Sans SC"/>
                 <a:ea typeface="HarmonyOS Sans SC"/>
                 <a:cs typeface="HarmonyOS Sans SC"/>
               </a:defRPr>
             </a:lvl7pPr>
-            <a:lvl8pPr>
-              <a:buNone/>
-              <a:defRPr>
+            <a:lvl8pPr algn="l">
+              <a:buNone/>
+              <a:defRPr sz="1650">
                 <a:latin typeface="HarmonyOS Sans SC"/>
                 <a:ea typeface="HarmonyOS Sans SC"/>
                 <a:cs typeface="HarmonyOS Sans SC"/>
               </a:defRPr>
             </a:lvl8pPr>
-            <a:lvl9pPr>
-              <a:buNone/>
-              <a:defRPr>
+            <a:lvl9pPr algn="l">
+              <a:buNone/>
+              <a:defRPr sz="1650">
                 <a:latin typeface="HarmonyOS Sans SC"/>
                 <a:ea typeface="HarmonyOS Sans SC"/>
                 <a:cs typeface="HarmonyOS Sans SC"/>
@@ -5180,12 +5180,12 @@
             </a:lvl9pPr>
           </a:lstStyle>
           <a:p xmlns:a="http://schemas.openxmlformats.org/drawingml/2006/main">
-            <a:pPr>
+            <a:pPr algn="l">
               <a:lnSpc>
                 <a:spcPct val="116000"/>
               </a:lnSpc>
               <a:buNone/>
-              <a:defRPr>
+              <a:defRPr sz="1650">
                 <a:latin typeface="HarmonyOS Sans SC"/>
                 <a:ea typeface="HarmonyOS Sans SC"/>
                 <a:cs typeface="HarmonyOS Sans SC"/>
@@ -5239,7 +5239,7 @@
         </p:blipFill>
         <p:spPr>
           <a:xfrm xmlns:a="http://schemas.openxmlformats.org/drawingml/2006/main">
-            <a:off x="609600" y="6524625"/>
+            <a:off x="609600" y="6400800"/>
             <a:ext cx="1952625" cy="228220"/>
           </a:xfrm>
           <a:prstGeom xmlns:a="http://schemas.openxmlformats.org/drawingml/2006/main" prst="rect">
@@ -5263,8 +5263,8 @@
         </p:nvSpPr>
         <p:spPr>
           <a:xfrm xmlns:a="http://schemas.openxmlformats.org/drawingml/2006/main">
-            <a:off x="11191875" y="6505575"/>
-            <a:ext cx="419100" cy="247650"/>
+            <a:off x="11163300" y="6400800"/>
+            <a:ext cx="419100" cy="228600"/>
           </a:xfrm>
           <a:prstGeom xmlns:a="http://schemas.openxmlformats.org/drawingml/2006/main" prst="rect">
             <a:avLst/>
@@ -5275,7 +5275,7 @@
           </a:ln>
         </p:spPr>
         <p:txBody>
-          <a:bodyPr xmlns:a="http://schemas.openxmlformats.org/drawingml/2006/main" wrap="none" lIns="0" tIns="0" rIns="0" bIns="0" anchor="ctr">
+          <a:bodyPr xmlns:a="http://schemas.openxmlformats.org/drawingml/2006/main" wrap="none" lIns="0" tIns="0" rIns="0" bIns="0" anchor="t">
             <a:noAutofit/>
           </a:bodyPr>
           <a:lstStyle xmlns:a="http://schemas.openxmlformats.org/drawingml/2006/main">
